--- a/docs/sample/sample_deck.pptx
+++ b/docs/sample/sample_deck.pptx
@@ -8574,7 +8574,7 @@
                 </a:solidFill>
                 <a:latin typeface="Arial"/>
               </a:rPr>
-              <a:t>checkout conversion: </a:t>
+              <a:t>Checkout conversion: </a:t>
             </a:r>
             <a:r>
               <a:rPr sz="1700">
